--- a/assets/figures-editable/c1-c2/c2-e21.pptx
+++ b/assets/figures-editable/c1-c2/c2-e21.pptx
@@ -7,7 +7,7 @@
   <p:sldIdLst>
     <p:sldId id="256" r:id="rId7"/>
   </p:sldIdLst>
-  <p:sldSz cx="11948160" cy="7924799" type="screen4x3"/>
+  <p:sldSz cx="12191695" cy="6858000" type="screen4x3"/>
   <p:notesSz cx="6858000" cy="9144000"/>
   <p:defaultTextStyle>
     <a:defPPr>
@@ -3098,14 +3098,14 @@
       <p:grpSpPr/>
       <p:sp>
         <p:nvSpPr>
-          <p:cNvPr id="2" name="text1" descr="sci-ppt:C2-E21-001"/>
+          <p:cNvPr id="2" name="C2-E21 text 0" descr="sci-ppt:o000"/>
           <p:cNvSpPr txBox="1"/>
           <p:nvPr/>
         </p:nvSpPr>
         <p:spPr>
           <a:xfrm>
-            <a:off x="316992" y="268224"/>
-            <a:ext cx="11277600" cy="359054"/>
+            <a:off x="274320" y="118872"/>
+            <a:ext cx="11612880" cy="340105"/>
           </a:xfrm>
           <a:prstGeom prst="rect">
             <a:avLst/>
@@ -3114,7 +3114,7 @@
           <a:effectLst/>
         </p:spPr>
         <p:txBody>
-          <a:bodyPr wrap="none" lIns="27432" rIns="27432" tIns="18288" bIns="18288" anchor="ctr">
+          <a:bodyPr wrap="none" lIns="18288" rIns="18288" tIns="18288" bIns="18288" anchor="t">
             <a:spAutoFit/>
           </a:bodyPr>
           <a:lstStyle/>
@@ -3125,34 +3125,31 @@
               </a:spcAft>
             </a:pPr>
             <a:r>
-              <a:rPr sz="1823" b="0" i="0">
+              <a:rPr sz="1900" b="1" i="0">
                 <a:solidFill>
                   <a:srgbClr val="8EDBD4"/>
                 </a:solidFill>
                 <a:latin typeface="Arial"/>
               </a:rPr>
-              <a:t>C2-E21 | Physical-variable diagram</a:t>
-            </a:r>
-          </a:p>
-        </p:txBody>
-      </p:sp>
-      <p:sp>
-        <p:nvSpPr>
-          <p:cNvPr id="3" name="rect2" descr="sci-ppt:C2-E21-002"/>
-          <p:cNvSpPr/>
+              <a:t>C2-E21 · Reduced interfacial energy jump and Fourier law</a:t>
+            </a:r>
+          </a:p>
+        </p:txBody>
+      </p:sp>
+      <p:cxnSp>
+        <p:nvCxnSpPr>
+          <p:cNvPr id="3" name="C2-E21 line 1" descr="sci-ppt:o001"/>
+          <p:cNvCxnSpPr/>
           <p:nvPr/>
-        </p:nvSpPr>
+        </p:nvCxnSpPr>
         <p:spPr>
           <a:xfrm>
-            <a:off x="975360" y="1463040"/>
-            <a:ext cx="4267200" cy="2682240"/>
+            <a:off x="914400" y="4846320"/>
+            <a:ext cx="5852160" cy="0"/>
           </a:xfrm>
-          <a:prstGeom prst="rect">
+          <a:prstGeom prst="line">
             <a:avLst/>
           </a:prstGeom>
-          <a:solidFill>
-            <a:srgbClr val="213E4B"/>
-          </a:solidFill>
           <a:ln w="19050">
             <a:solidFill>
               <a:srgbClr val="B4C7D2"/>
@@ -3160,29 +3157,21 @@
           </a:ln>
           <a:effectLst/>
         </p:spPr>
-        <p:txBody>
-          <a:bodyPr rtlCol="0" anchor="ctr"/>
-          <a:lstStyle/>
-          <a:p>
-            <a:pPr algn="ctr"/>
-          </a:p>
-        </p:txBody>
-      </p:sp>
-      <p:sp>
-        <p:nvSpPr>
-          <p:cNvPr id="4" name="rect3" descr="sci-ppt:C2-E21-003"/>
-          <p:cNvSpPr/>
+      </p:cxnSp>
+      <p:cxnSp>
+        <p:nvCxnSpPr>
+          <p:cNvPr id="4" name="C2-E21 line 2" descr="sci-ppt:o002"/>
+          <p:cNvCxnSpPr/>
           <p:nvPr/>
-        </p:nvSpPr>
+        </p:nvCxnSpPr>
         <p:spPr>
           <a:xfrm>
-            <a:off x="5242560" y="1463040"/>
-            <a:ext cx="5242560" cy="2682240"/>
+            <a:off x="914400" y="1371600"/>
+            <a:ext cx="0" cy="3474720"/>
           </a:xfrm>
-          <a:prstGeom prst="rect">
+          <a:prstGeom prst="line">
             <a:avLst/>
           </a:prstGeom>
-          <a:noFill/>
           <a:ln w="19050">
             <a:solidFill>
               <a:srgbClr val="B4C7D2"/>
@@ -3190,24 +3179,17 @@
           </a:ln>
           <a:effectLst/>
         </p:spPr>
-        <p:txBody>
-          <a:bodyPr rtlCol="0" anchor="ctr"/>
-          <a:lstStyle/>
-          <a:p>
-            <a:pPr algn="ctr"/>
-          </a:p>
-        </p:txBody>
-      </p:sp>
-      <p:sp>
-        <p:nvSpPr>
-          <p:cNvPr id="5" name="text4" descr="sci-ppt:C2-E21-004"/>
+      </p:cxnSp>
+      <p:sp>
+        <p:nvSpPr>
+          <p:cNvPr id="5" name="C2-E21 text 3" descr="sci-ppt:o003"/>
           <p:cNvSpPr txBox="1"/>
           <p:nvPr/>
         </p:nvSpPr>
         <p:spPr>
           <a:xfrm>
-            <a:off x="2194560" y="1767840"/>
-            <a:ext cx="2438400" cy="434644"/>
+            <a:off x="914400" y="5129783"/>
+            <a:ext cx="5852160" cy="231648"/>
           </a:xfrm>
           <a:prstGeom prst="rect">
             <a:avLst/>
@@ -3216,38 +3198,38 @@
           <a:effectLst/>
         </p:spPr>
         <p:txBody>
-          <a:bodyPr wrap="none" lIns="27432" rIns="27432" tIns="18288" bIns="18288" anchor="ctr">
+          <a:bodyPr wrap="none" lIns="18288" rIns="18288" tIns="18288" bIns="18288" anchor="t">
             <a:spAutoFit/>
           </a:bodyPr>
           <a:lstStyle/>
           <a:p>
-            <a:pPr algn="l">
+            <a:pPr algn="ctr">
               <a:spcAft>
                 <a:spcPts val="0"/>
               </a:spcAft>
             </a:pPr>
             <a:r>
-              <a:rPr sz="2208" b="0" i="0">
+              <a:rPr sz="1200" b="0" i="0">
                 <a:solidFill>
                   <a:srgbClr val="E7F0F3"/>
                 </a:solidFill>
                 <a:latin typeface="Arial"/>
               </a:rPr>
-              <a:t>Vapor</a:t>
-            </a:r>
-          </a:p>
-        </p:txBody>
-      </p:sp>
-      <p:sp>
-        <p:nvSpPr>
-          <p:cNvPr id="6" name="text5" descr="sci-ppt:C2-E21-005"/>
+              <a:t>distance from the interface (liquid | vapor)</a:t>
+            </a:r>
+          </a:p>
+        </p:txBody>
+      </p:sp>
+      <p:sp>
+        <p:nvSpPr>
+          <p:cNvPr id="6" name="C2-E21 text 4" descr="sci-ppt:o004"/>
           <p:cNvSpPr txBox="1"/>
           <p:nvPr/>
         </p:nvSpPr>
         <p:spPr>
           <a:xfrm>
-            <a:off x="7315200" y="1767840"/>
-            <a:ext cx="2438400" cy="434644"/>
+            <a:off x="365760" y="1024128"/>
+            <a:ext cx="5852160" cy="231648"/>
           </a:xfrm>
           <a:prstGeom prst="rect">
             <a:avLst/>
@@ -3256,7 +3238,7 @@
           <a:effectLst/>
         </p:spPr>
         <p:txBody>
-          <a:bodyPr wrap="none" lIns="27432" rIns="27432" tIns="18288" bIns="18288" anchor="ctr">
+          <a:bodyPr wrap="none" lIns="18288" rIns="18288" tIns="18288" bIns="18288" anchor="t">
             <a:spAutoFit/>
           </a:bodyPr>
           <a:lstStyle/>
@@ -3267,34 +3249,1477 @@
               </a:spcAft>
             </a:pPr>
             <a:r>
-              <a:rPr sz="2208" b="0" i="0">
+              <a:rPr sz="1200" b="0" i="0">
                 <a:solidFill>
                   <a:srgbClr val="E7F0F3"/>
                 </a:solidFill>
                 <a:latin typeface="Arial"/>
               </a:rPr>
-              <a:t>Liquid</a:t>
-            </a:r>
+              <a:t>temperature (relative)</a:t>
+            </a:r>
+          </a:p>
+        </p:txBody>
+      </p:sp>
+      <p:sp>
+        <p:nvSpPr>
+          <p:cNvPr id="7" name="C2-E21 polygon 5" descr="sci-ppt:o005"/>
+          <p:cNvSpPr/>
+          <p:nvPr/>
+        </p:nvSpPr>
+        <p:spPr>
+          <a:xfrm>
+            <a:off x="914400" y="2006138"/>
+            <a:ext cx="2918746" cy="1102822"/>
+          </a:xfrm>
+          <a:custGeom>
+            <a:avLst/>
+            <a:gdLst/>
+            <a:ahLst/>
+            <a:cxnLst/>
+            <a:rect l="l" t="t" r="r" b="b"/>
+            <a:pathLst>
+              <a:path w="2918746" h="1102822">
+                <a:moveTo>
+                  <a:pt x="0" y="1102822"/>
+                </a:moveTo>
+                <a:lnTo>
+                  <a:pt x="14667" y="1097280"/>
+                </a:lnTo>
+                <a:lnTo>
+                  <a:pt x="29334" y="1091738"/>
+                </a:lnTo>
+                <a:lnTo>
+                  <a:pt x="44001" y="1086196"/>
+                </a:lnTo>
+                <a:lnTo>
+                  <a:pt x="58668" y="1080654"/>
+                </a:lnTo>
+                <a:lnTo>
+                  <a:pt x="73335" y="1075112"/>
+                </a:lnTo>
+                <a:lnTo>
+                  <a:pt x="88002" y="1069571"/>
+                </a:lnTo>
+                <a:lnTo>
+                  <a:pt x="102669" y="1064029"/>
+                </a:lnTo>
+                <a:lnTo>
+                  <a:pt x="117336" y="1058487"/>
+                </a:lnTo>
+                <a:lnTo>
+                  <a:pt x="132003" y="1052945"/>
+                </a:lnTo>
+                <a:lnTo>
+                  <a:pt x="146670" y="1047403"/>
+                </a:lnTo>
+                <a:lnTo>
+                  <a:pt x="161337" y="1041861"/>
+                </a:lnTo>
+                <a:lnTo>
+                  <a:pt x="176004" y="1036320"/>
+                </a:lnTo>
+                <a:lnTo>
+                  <a:pt x="190671" y="1030778"/>
+                </a:lnTo>
+                <a:lnTo>
+                  <a:pt x="205338" y="1025236"/>
+                </a:lnTo>
+                <a:lnTo>
+                  <a:pt x="220006" y="1019694"/>
+                </a:lnTo>
+                <a:lnTo>
+                  <a:pt x="234673" y="1014152"/>
+                </a:lnTo>
+                <a:lnTo>
+                  <a:pt x="249340" y="1008611"/>
+                </a:lnTo>
+                <a:lnTo>
+                  <a:pt x="264007" y="1003069"/>
+                </a:lnTo>
+                <a:lnTo>
+                  <a:pt x="278674" y="997527"/>
+                </a:lnTo>
+                <a:lnTo>
+                  <a:pt x="293341" y="991985"/>
+                </a:lnTo>
+                <a:lnTo>
+                  <a:pt x="308008" y="986443"/>
+                </a:lnTo>
+                <a:lnTo>
+                  <a:pt x="322675" y="980902"/>
+                </a:lnTo>
+                <a:lnTo>
+                  <a:pt x="337342" y="975360"/>
+                </a:lnTo>
+                <a:lnTo>
+                  <a:pt x="352009" y="969818"/>
+                </a:lnTo>
+                <a:lnTo>
+                  <a:pt x="366676" y="964276"/>
+                </a:lnTo>
+                <a:lnTo>
+                  <a:pt x="381343" y="958734"/>
+                </a:lnTo>
+                <a:lnTo>
+                  <a:pt x="396010" y="953192"/>
+                </a:lnTo>
+                <a:lnTo>
+                  <a:pt x="410677" y="947651"/>
+                </a:lnTo>
+                <a:lnTo>
+                  <a:pt x="425344" y="942109"/>
+                </a:lnTo>
+                <a:lnTo>
+                  <a:pt x="440012" y="936567"/>
+                </a:lnTo>
+                <a:lnTo>
+                  <a:pt x="454679" y="931025"/>
+                </a:lnTo>
+                <a:lnTo>
+                  <a:pt x="469346" y="925483"/>
+                </a:lnTo>
+                <a:lnTo>
+                  <a:pt x="484013" y="919942"/>
+                </a:lnTo>
+                <a:lnTo>
+                  <a:pt x="498680" y="914400"/>
+                </a:lnTo>
+                <a:lnTo>
+                  <a:pt x="513347" y="908858"/>
+                </a:lnTo>
+                <a:lnTo>
+                  <a:pt x="528014" y="903316"/>
+                </a:lnTo>
+                <a:lnTo>
+                  <a:pt x="542681" y="897774"/>
+                </a:lnTo>
+                <a:lnTo>
+                  <a:pt x="557348" y="892232"/>
+                </a:lnTo>
+                <a:lnTo>
+                  <a:pt x="572015" y="886691"/>
+                </a:lnTo>
+                <a:lnTo>
+                  <a:pt x="586682" y="881149"/>
+                </a:lnTo>
+                <a:lnTo>
+                  <a:pt x="601349" y="875607"/>
+                </a:lnTo>
+                <a:lnTo>
+                  <a:pt x="616016" y="870065"/>
+                </a:lnTo>
+                <a:lnTo>
+                  <a:pt x="630683" y="864523"/>
+                </a:lnTo>
+                <a:lnTo>
+                  <a:pt x="645350" y="858982"/>
+                </a:lnTo>
+                <a:lnTo>
+                  <a:pt x="660018" y="853440"/>
+                </a:lnTo>
+                <a:lnTo>
+                  <a:pt x="674685" y="847898"/>
+                </a:lnTo>
+                <a:lnTo>
+                  <a:pt x="689352" y="842356"/>
+                </a:lnTo>
+                <a:lnTo>
+                  <a:pt x="704019" y="836814"/>
+                </a:lnTo>
+                <a:lnTo>
+                  <a:pt x="718686" y="831272"/>
+                </a:lnTo>
+                <a:lnTo>
+                  <a:pt x="733353" y="825731"/>
+                </a:lnTo>
+                <a:lnTo>
+                  <a:pt x="748020" y="820189"/>
+                </a:lnTo>
+                <a:lnTo>
+                  <a:pt x="762687" y="814647"/>
+                </a:lnTo>
+                <a:lnTo>
+                  <a:pt x="777354" y="809105"/>
+                </a:lnTo>
+                <a:lnTo>
+                  <a:pt x="792021" y="803563"/>
+                </a:lnTo>
+                <a:lnTo>
+                  <a:pt x="806688" y="798022"/>
+                </a:lnTo>
+                <a:lnTo>
+                  <a:pt x="821355" y="792480"/>
+                </a:lnTo>
+                <a:lnTo>
+                  <a:pt x="836022" y="786938"/>
+                </a:lnTo>
+                <a:lnTo>
+                  <a:pt x="850689" y="781396"/>
+                </a:lnTo>
+                <a:lnTo>
+                  <a:pt x="865356" y="775854"/>
+                </a:lnTo>
+                <a:lnTo>
+                  <a:pt x="880024" y="770312"/>
+                </a:lnTo>
+                <a:lnTo>
+                  <a:pt x="894691" y="764771"/>
+                </a:lnTo>
+                <a:lnTo>
+                  <a:pt x="909358" y="759229"/>
+                </a:lnTo>
+                <a:lnTo>
+                  <a:pt x="924025" y="753687"/>
+                </a:lnTo>
+                <a:lnTo>
+                  <a:pt x="938692" y="748145"/>
+                </a:lnTo>
+                <a:lnTo>
+                  <a:pt x="953359" y="742603"/>
+                </a:lnTo>
+                <a:lnTo>
+                  <a:pt x="968026" y="737062"/>
+                </a:lnTo>
+                <a:lnTo>
+                  <a:pt x="982693" y="731520"/>
+                </a:lnTo>
+                <a:lnTo>
+                  <a:pt x="997360" y="725978"/>
+                </a:lnTo>
+                <a:lnTo>
+                  <a:pt x="1012027" y="720436"/>
+                </a:lnTo>
+                <a:lnTo>
+                  <a:pt x="1026694" y="714894"/>
+                </a:lnTo>
+                <a:lnTo>
+                  <a:pt x="1041361" y="709352"/>
+                </a:lnTo>
+                <a:lnTo>
+                  <a:pt x="1056028" y="703811"/>
+                </a:lnTo>
+                <a:lnTo>
+                  <a:pt x="1070695" y="698269"/>
+                </a:lnTo>
+                <a:lnTo>
+                  <a:pt x="1085363" y="692727"/>
+                </a:lnTo>
+                <a:lnTo>
+                  <a:pt x="1100030" y="687185"/>
+                </a:lnTo>
+                <a:lnTo>
+                  <a:pt x="1114697" y="681643"/>
+                </a:lnTo>
+                <a:lnTo>
+                  <a:pt x="1129364" y="676102"/>
+                </a:lnTo>
+                <a:lnTo>
+                  <a:pt x="1144031" y="670560"/>
+                </a:lnTo>
+                <a:lnTo>
+                  <a:pt x="1158698" y="665018"/>
+                </a:lnTo>
+                <a:lnTo>
+                  <a:pt x="1173365" y="659476"/>
+                </a:lnTo>
+                <a:lnTo>
+                  <a:pt x="1188032" y="653934"/>
+                </a:lnTo>
+                <a:lnTo>
+                  <a:pt x="1202699" y="648392"/>
+                </a:lnTo>
+                <a:lnTo>
+                  <a:pt x="1217366" y="642851"/>
+                </a:lnTo>
+                <a:lnTo>
+                  <a:pt x="1232033" y="637309"/>
+                </a:lnTo>
+                <a:lnTo>
+                  <a:pt x="1246700" y="631767"/>
+                </a:lnTo>
+                <a:lnTo>
+                  <a:pt x="1261367" y="626225"/>
+                </a:lnTo>
+                <a:lnTo>
+                  <a:pt x="1276034" y="620683"/>
+                </a:lnTo>
+                <a:lnTo>
+                  <a:pt x="1290701" y="615142"/>
+                </a:lnTo>
+                <a:lnTo>
+                  <a:pt x="1305369" y="609600"/>
+                </a:lnTo>
+                <a:lnTo>
+                  <a:pt x="1320036" y="604058"/>
+                </a:lnTo>
+                <a:lnTo>
+                  <a:pt x="1334703" y="598516"/>
+                </a:lnTo>
+                <a:lnTo>
+                  <a:pt x="1349370" y="592974"/>
+                </a:lnTo>
+                <a:lnTo>
+                  <a:pt x="1364037" y="587432"/>
+                </a:lnTo>
+                <a:lnTo>
+                  <a:pt x="1378704" y="581891"/>
+                </a:lnTo>
+                <a:lnTo>
+                  <a:pt x="1393371" y="576349"/>
+                </a:lnTo>
+                <a:lnTo>
+                  <a:pt x="1408038" y="570807"/>
+                </a:lnTo>
+                <a:lnTo>
+                  <a:pt x="1422705" y="565265"/>
+                </a:lnTo>
+                <a:lnTo>
+                  <a:pt x="1437372" y="559723"/>
+                </a:lnTo>
+                <a:lnTo>
+                  <a:pt x="1452039" y="554182"/>
+                </a:lnTo>
+                <a:lnTo>
+                  <a:pt x="1466706" y="548640"/>
+                </a:lnTo>
+                <a:lnTo>
+                  <a:pt x="1481373" y="543098"/>
+                </a:lnTo>
+                <a:lnTo>
+                  <a:pt x="1496040" y="537556"/>
+                </a:lnTo>
+                <a:lnTo>
+                  <a:pt x="1510707" y="532014"/>
+                </a:lnTo>
+                <a:lnTo>
+                  <a:pt x="1525375" y="526472"/>
+                </a:lnTo>
+                <a:lnTo>
+                  <a:pt x="1540042" y="520931"/>
+                </a:lnTo>
+                <a:lnTo>
+                  <a:pt x="1554709" y="515389"/>
+                </a:lnTo>
+                <a:lnTo>
+                  <a:pt x="1569376" y="509847"/>
+                </a:lnTo>
+                <a:lnTo>
+                  <a:pt x="1584043" y="504305"/>
+                </a:lnTo>
+                <a:lnTo>
+                  <a:pt x="1598710" y="498763"/>
+                </a:lnTo>
+                <a:lnTo>
+                  <a:pt x="1613377" y="493222"/>
+                </a:lnTo>
+                <a:lnTo>
+                  <a:pt x="1628044" y="487680"/>
+                </a:lnTo>
+                <a:lnTo>
+                  <a:pt x="1642711" y="482138"/>
+                </a:lnTo>
+                <a:lnTo>
+                  <a:pt x="1657378" y="476596"/>
+                </a:lnTo>
+                <a:lnTo>
+                  <a:pt x="1672045" y="471054"/>
+                </a:lnTo>
+                <a:lnTo>
+                  <a:pt x="1686712" y="465512"/>
+                </a:lnTo>
+                <a:lnTo>
+                  <a:pt x="1701379" y="459971"/>
+                </a:lnTo>
+                <a:lnTo>
+                  <a:pt x="1716046" y="454429"/>
+                </a:lnTo>
+                <a:lnTo>
+                  <a:pt x="1730713" y="448887"/>
+                </a:lnTo>
+                <a:lnTo>
+                  <a:pt x="1745381" y="443345"/>
+                </a:lnTo>
+                <a:lnTo>
+                  <a:pt x="1760048" y="437803"/>
+                </a:lnTo>
+                <a:lnTo>
+                  <a:pt x="1774715" y="432262"/>
+                </a:lnTo>
+                <a:lnTo>
+                  <a:pt x="1789382" y="426720"/>
+                </a:lnTo>
+                <a:lnTo>
+                  <a:pt x="1804049" y="421178"/>
+                </a:lnTo>
+                <a:lnTo>
+                  <a:pt x="1818716" y="415636"/>
+                </a:lnTo>
+                <a:lnTo>
+                  <a:pt x="1833383" y="410094"/>
+                </a:lnTo>
+                <a:lnTo>
+                  <a:pt x="1848050" y="404552"/>
+                </a:lnTo>
+                <a:lnTo>
+                  <a:pt x="1862717" y="399011"/>
+                </a:lnTo>
+                <a:lnTo>
+                  <a:pt x="1877384" y="393469"/>
+                </a:lnTo>
+                <a:lnTo>
+                  <a:pt x="1892051" y="387927"/>
+                </a:lnTo>
+                <a:lnTo>
+                  <a:pt x="1906718" y="382385"/>
+                </a:lnTo>
+                <a:lnTo>
+                  <a:pt x="1921385" y="376843"/>
+                </a:lnTo>
+                <a:lnTo>
+                  <a:pt x="1936052" y="371302"/>
+                </a:lnTo>
+                <a:lnTo>
+                  <a:pt x="1950720" y="365760"/>
+                </a:lnTo>
+                <a:lnTo>
+                  <a:pt x="1965387" y="360218"/>
+                </a:lnTo>
+                <a:lnTo>
+                  <a:pt x="1980054" y="354676"/>
+                </a:lnTo>
+                <a:lnTo>
+                  <a:pt x="1994721" y="349134"/>
+                </a:lnTo>
+                <a:lnTo>
+                  <a:pt x="2009388" y="343592"/>
+                </a:lnTo>
+                <a:lnTo>
+                  <a:pt x="2024055" y="338051"/>
+                </a:lnTo>
+                <a:lnTo>
+                  <a:pt x="2038722" y="332509"/>
+                </a:lnTo>
+                <a:lnTo>
+                  <a:pt x="2053389" y="326967"/>
+                </a:lnTo>
+                <a:lnTo>
+                  <a:pt x="2068056" y="321425"/>
+                </a:lnTo>
+                <a:lnTo>
+                  <a:pt x="2082723" y="315883"/>
+                </a:lnTo>
+                <a:lnTo>
+                  <a:pt x="2097390" y="310342"/>
+                </a:lnTo>
+                <a:lnTo>
+                  <a:pt x="2112057" y="304800"/>
+                </a:lnTo>
+                <a:lnTo>
+                  <a:pt x="2126724" y="299258"/>
+                </a:lnTo>
+                <a:lnTo>
+                  <a:pt x="2141391" y="293716"/>
+                </a:lnTo>
+                <a:lnTo>
+                  <a:pt x="2156058" y="288174"/>
+                </a:lnTo>
+                <a:lnTo>
+                  <a:pt x="2170726" y="282632"/>
+                </a:lnTo>
+                <a:lnTo>
+                  <a:pt x="2185393" y="277091"/>
+                </a:lnTo>
+                <a:lnTo>
+                  <a:pt x="2200060" y="271549"/>
+                </a:lnTo>
+                <a:lnTo>
+                  <a:pt x="2214727" y="266007"/>
+                </a:lnTo>
+                <a:lnTo>
+                  <a:pt x="2229394" y="260465"/>
+                </a:lnTo>
+                <a:lnTo>
+                  <a:pt x="2244061" y="254923"/>
+                </a:lnTo>
+                <a:lnTo>
+                  <a:pt x="2258728" y="249382"/>
+                </a:lnTo>
+                <a:lnTo>
+                  <a:pt x="2273395" y="243840"/>
+                </a:lnTo>
+                <a:lnTo>
+                  <a:pt x="2288062" y="238298"/>
+                </a:lnTo>
+                <a:lnTo>
+                  <a:pt x="2302729" y="232756"/>
+                </a:lnTo>
+                <a:lnTo>
+                  <a:pt x="2317396" y="227214"/>
+                </a:lnTo>
+                <a:lnTo>
+                  <a:pt x="2332063" y="221672"/>
+                </a:lnTo>
+                <a:lnTo>
+                  <a:pt x="2346730" y="216131"/>
+                </a:lnTo>
+                <a:lnTo>
+                  <a:pt x="2361397" y="210589"/>
+                </a:lnTo>
+                <a:lnTo>
+                  <a:pt x="2376064" y="205047"/>
+                </a:lnTo>
+                <a:lnTo>
+                  <a:pt x="2390732" y="199505"/>
+                </a:lnTo>
+                <a:lnTo>
+                  <a:pt x="2405399" y="193963"/>
+                </a:lnTo>
+                <a:lnTo>
+                  <a:pt x="2420066" y="188422"/>
+                </a:lnTo>
+                <a:lnTo>
+                  <a:pt x="2434733" y="182880"/>
+                </a:lnTo>
+                <a:lnTo>
+                  <a:pt x="2449400" y="177338"/>
+                </a:lnTo>
+                <a:lnTo>
+                  <a:pt x="2464067" y="171796"/>
+                </a:lnTo>
+                <a:lnTo>
+                  <a:pt x="2478734" y="166254"/>
+                </a:lnTo>
+                <a:lnTo>
+                  <a:pt x="2493401" y="160712"/>
+                </a:lnTo>
+                <a:lnTo>
+                  <a:pt x="2508068" y="155171"/>
+                </a:lnTo>
+                <a:lnTo>
+                  <a:pt x="2522735" y="149629"/>
+                </a:lnTo>
+                <a:lnTo>
+                  <a:pt x="2537402" y="144087"/>
+                </a:lnTo>
+                <a:lnTo>
+                  <a:pt x="2552069" y="138545"/>
+                </a:lnTo>
+                <a:lnTo>
+                  <a:pt x="2566736" y="133003"/>
+                </a:lnTo>
+                <a:lnTo>
+                  <a:pt x="2581403" y="127462"/>
+                </a:lnTo>
+                <a:lnTo>
+                  <a:pt x="2596070" y="121920"/>
+                </a:lnTo>
+                <a:lnTo>
+                  <a:pt x="2610738" y="116378"/>
+                </a:lnTo>
+                <a:lnTo>
+                  <a:pt x="2625405" y="110836"/>
+                </a:lnTo>
+                <a:lnTo>
+                  <a:pt x="2640072" y="105294"/>
+                </a:lnTo>
+                <a:lnTo>
+                  <a:pt x="2654739" y="99752"/>
+                </a:lnTo>
+                <a:lnTo>
+                  <a:pt x="2669406" y="94211"/>
+                </a:lnTo>
+                <a:lnTo>
+                  <a:pt x="2684073" y="88669"/>
+                </a:lnTo>
+                <a:lnTo>
+                  <a:pt x="2698740" y="83127"/>
+                </a:lnTo>
+                <a:lnTo>
+                  <a:pt x="2713407" y="77585"/>
+                </a:lnTo>
+                <a:lnTo>
+                  <a:pt x="2728074" y="72043"/>
+                </a:lnTo>
+                <a:lnTo>
+                  <a:pt x="2742741" y="66502"/>
+                </a:lnTo>
+                <a:lnTo>
+                  <a:pt x="2757408" y="60960"/>
+                </a:lnTo>
+                <a:lnTo>
+                  <a:pt x="2772075" y="55418"/>
+                </a:lnTo>
+                <a:lnTo>
+                  <a:pt x="2786742" y="49876"/>
+                </a:lnTo>
+                <a:lnTo>
+                  <a:pt x="2801409" y="44334"/>
+                </a:lnTo>
+                <a:lnTo>
+                  <a:pt x="2816076" y="38792"/>
+                </a:lnTo>
+                <a:lnTo>
+                  <a:pt x="2830744" y="33251"/>
+                </a:lnTo>
+                <a:lnTo>
+                  <a:pt x="2845411" y="27709"/>
+                </a:lnTo>
+                <a:lnTo>
+                  <a:pt x="2860078" y="22167"/>
+                </a:lnTo>
+                <a:lnTo>
+                  <a:pt x="2874745" y="16625"/>
+                </a:lnTo>
+                <a:lnTo>
+                  <a:pt x="2889412" y="11083"/>
+                </a:lnTo>
+                <a:lnTo>
+                  <a:pt x="2904079" y="5542"/>
+                </a:lnTo>
+                <a:lnTo>
+                  <a:pt x="2918746" y="0"/>
+                </a:lnTo>
+              </a:path>
+            </a:pathLst>
+          </a:custGeom>
+          <a:noFill/>
+          <a:ln w="38100">
+            <a:solidFill>
+              <a:srgbClr val="F2B880"/>
+            </a:solidFill>
+          </a:ln>
+          <a:effectLst/>
+        </p:spPr>
+        <p:txBody>
+          <a:bodyPr rtlCol="0" anchor="ctr"/>
+          <a:lstStyle/>
+          <a:p>
+            <a:pPr algn="ctr"/>
+          </a:p>
+        </p:txBody>
+      </p:sp>
+      <p:sp>
+        <p:nvSpPr>
+          <p:cNvPr id="8" name="C2-E21 polygon 6" descr="sci-ppt:o006"/>
+          <p:cNvSpPr/>
+          <p:nvPr/>
+        </p:nvSpPr>
+        <p:spPr>
+          <a:xfrm>
+            <a:off x="3847813" y="2004000"/>
+            <a:ext cx="2918747" cy="252074"/>
+          </a:xfrm>
+          <a:custGeom>
+            <a:avLst/>
+            <a:gdLst/>
+            <a:ahLst/>
+            <a:cxnLst/>
+            <a:rect l="l" t="t" r="r" b="b"/>
+            <a:pathLst>
+              <a:path w="2918747" h="252074">
+                <a:moveTo>
+                  <a:pt x="0" y="0"/>
+                </a:moveTo>
+                <a:lnTo>
+                  <a:pt x="14667" y="1267"/>
+                </a:lnTo>
+                <a:lnTo>
+                  <a:pt x="29334" y="2534"/>
+                </a:lnTo>
+                <a:lnTo>
+                  <a:pt x="44001" y="3800"/>
+                </a:lnTo>
+                <a:lnTo>
+                  <a:pt x="58668" y="5067"/>
+                </a:lnTo>
+                <a:lnTo>
+                  <a:pt x="73335" y="6334"/>
+                </a:lnTo>
+                <a:lnTo>
+                  <a:pt x="88002" y="7600"/>
+                </a:lnTo>
+                <a:lnTo>
+                  <a:pt x="102670" y="8867"/>
+                </a:lnTo>
+                <a:lnTo>
+                  <a:pt x="117337" y="10134"/>
+                </a:lnTo>
+                <a:lnTo>
+                  <a:pt x="132004" y="11400"/>
+                </a:lnTo>
+                <a:lnTo>
+                  <a:pt x="146671" y="12667"/>
+                </a:lnTo>
+                <a:lnTo>
+                  <a:pt x="161338" y="13934"/>
+                </a:lnTo>
+                <a:lnTo>
+                  <a:pt x="176005" y="15201"/>
+                </a:lnTo>
+                <a:lnTo>
+                  <a:pt x="190672" y="16467"/>
+                </a:lnTo>
+                <a:lnTo>
+                  <a:pt x="205339" y="17734"/>
+                </a:lnTo>
+                <a:lnTo>
+                  <a:pt x="220006" y="19001"/>
+                </a:lnTo>
+                <a:lnTo>
+                  <a:pt x="234673" y="20267"/>
+                </a:lnTo>
+                <a:lnTo>
+                  <a:pt x="249340" y="21534"/>
+                </a:lnTo>
+                <a:lnTo>
+                  <a:pt x="264007" y="22801"/>
+                </a:lnTo>
+                <a:lnTo>
+                  <a:pt x="278674" y="24067"/>
+                </a:lnTo>
+                <a:lnTo>
+                  <a:pt x="293341" y="25334"/>
+                </a:lnTo>
+                <a:lnTo>
+                  <a:pt x="308008" y="26601"/>
+                </a:lnTo>
+                <a:lnTo>
+                  <a:pt x="322676" y="27868"/>
+                </a:lnTo>
+                <a:lnTo>
+                  <a:pt x="337343" y="29134"/>
+                </a:lnTo>
+                <a:lnTo>
+                  <a:pt x="352010" y="30401"/>
+                </a:lnTo>
+                <a:lnTo>
+                  <a:pt x="366677" y="31668"/>
+                </a:lnTo>
+                <a:lnTo>
+                  <a:pt x="381344" y="32934"/>
+                </a:lnTo>
+                <a:lnTo>
+                  <a:pt x="396011" y="34201"/>
+                </a:lnTo>
+                <a:lnTo>
+                  <a:pt x="410678" y="35468"/>
+                </a:lnTo>
+                <a:lnTo>
+                  <a:pt x="425345" y="36734"/>
+                </a:lnTo>
+                <a:lnTo>
+                  <a:pt x="440012" y="38001"/>
+                </a:lnTo>
+                <a:lnTo>
+                  <a:pt x="454679" y="39268"/>
+                </a:lnTo>
+                <a:lnTo>
+                  <a:pt x="469346" y="40535"/>
+                </a:lnTo>
+                <a:lnTo>
+                  <a:pt x="484013" y="41801"/>
+                </a:lnTo>
+                <a:lnTo>
+                  <a:pt x="498680" y="43068"/>
+                </a:lnTo>
+                <a:lnTo>
+                  <a:pt x="513347" y="44335"/>
+                </a:lnTo>
+                <a:lnTo>
+                  <a:pt x="528014" y="45601"/>
+                </a:lnTo>
+                <a:lnTo>
+                  <a:pt x="542682" y="46868"/>
+                </a:lnTo>
+                <a:lnTo>
+                  <a:pt x="557349" y="48135"/>
+                </a:lnTo>
+                <a:lnTo>
+                  <a:pt x="572016" y="49401"/>
+                </a:lnTo>
+                <a:lnTo>
+                  <a:pt x="586683" y="50668"/>
+                </a:lnTo>
+                <a:lnTo>
+                  <a:pt x="601350" y="51935"/>
+                </a:lnTo>
+                <a:lnTo>
+                  <a:pt x="616017" y="53202"/>
+                </a:lnTo>
+                <a:lnTo>
+                  <a:pt x="630684" y="54468"/>
+                </a:lnTo>
+                <a:lnTo>
+                  <a:pt x="645351" y="55735"/>
+                </a:lnTo>
+                <a:lnTo>
+                  <a:pt x="660018" y="57002"/>
+                </a:lnTo>
+                <a:lnTo>
+                  <a:pt x="674685" y="58268"/>
+                </a:lnTo>
+                <a:lnTo>
+                  <a:pt x="689352" y="59535"/>
+                </a:lnTo>
+                <a:lnTo>
+                  <a:pt x="704019" y="60802"/>
+                </a:lnTo>
+                <a:lnTo>
+                  <a:pt x="718686" y="62068"/>
+                </a:lnTo>
+                <a:lnTo>
+                  <a:pt x="733353" y="63335"/>
+                </a:lnTo>
+                <a:lnTo>
+                  <a:pt x="748020" y="64602"/>
+                </a:lnTo>
+                <a:lnTo>
+                  <a:pt x="762688" y="65869"/>
+                </a:lnTo>
+                <a:lnTo>
+                  <a:pt x="777355" y="67135"/>
+                </a:lnTo>
+                <a:lnTo>
+                  <a:pt x="792022" y="68402"/>
+                </a:lnTo>
+                <a:lnTo>
+                  <a:pt x="806689" y="69669"/>
+                </a:lnTo>
+                <a:lnTo>
+                  <a:pt x="821356" y="70935"/>
+                </a:lnTo>
+                <a:lnTo>
+                  <a:pt x="836023" y="72202"/>
+                </a:lnTo>
+                <a:lnTo>
+                  <a:pt x="850690" y="73469"/>
+                </a:lnTo>
+                <a:lnTo>
+                  <a:pt x="865357" y="74736"/>
+                </a:lnTo>
+                <a:lnTo>
+                  <a:pt x="880024" y="76002"/>
+                </a:lnTo>
+                <a:lnTo>
+                  <a:pt x="894691" y="77269"/>
+                </a:lnTo>
+                <a:lnTo>
+                  <a:pt x="909358" y="78536"/>
+                </a:lnTo>
+                <a:lnTo>
+                  <a:pt x="924025" y="79802"/>
+                </a:lnTo>
+                <a:lnTo>
+                  <a:pt x="938692" y="81069"/>
+                </a:lnTo>
+                <a:lnTo>
+                  <a:pt x="953359" y="82336"/>
+                </a:lnTo>
+                <a:lnTo>
+                  <a:pt x="968027" y="83602"/>
+                </a:lnTo>
+                <a:lnTo>
+                  <a:pt x="982694" y="84869"/>
+                </a:lnTo>
+                <a:lnTo>
+                  <a:pt x="997361" y="86136"/>
+                </a:lnTo>
+                <a:lnTo>
+                  <a:pt x="1012028" y="87403"/>
+                </a:lnTo>
+                <a:lnTo>
+                  <a:pt x="1026695" y="88669"/>
+                </a:lnTo>
+                <a:lnTo>
+                  <a:pt x="1041362" y="89936"/>
+                </a:lnTo>
+                <a:lnTo>
+                  <a:pt x="1056029" y="91203"/>
+                </a:lnTo>
+                <a:lnTo>
+                  <a:pt x="1070696" y="92469"/>
+                </a:lnTo>
+                <a:lnTo>
+                  <a:pt x="1085363" y="93736"/>
+                </a:lnTo>
+                <a:lnTo>
+                  <a:pt x="1100030" y="95003"/>
+                </a:lnTo>
+                <a:lnTo>
+                  <a:pt x="1114697" y="96269"/>
+                </a:lnTo>
+                <a:lnTo>
+                  <a:pt x="1129364" y="97536"/>
+                </a:lnTo>
+                <a:lnTo>
+                  <a:pt x="1144031" y="98803"/>
+                </a:lnTo>
+                <a:lnTo>
+                  <a:pt x="1158698" y="100070"/>
+                </a:lnTo>
+                <a:lnTo>
+                  <a:pt x="1173365" y="101336"/>
+                </a:lnTo>
+                <a:lnTo>
+                  <a:pt x="1188033" y="102603"/>
+                </a:lnTo>
+                <a:lnTo>
+                  <a:pt x="1202700" y="103870"/>
+                </a:lnTo>
+                <a:lnTo>
+                  <a:pt x="1217367" y="105136"/>
+                </a:lnTo>
+                <a:lnTo>
+                  <a:pt x="1232034" y="106403"/>
+                </a:lnTo>
+                <a:lnTo>
+                  <a:pt x="1246701" y="107670"/>
+                </a:lnTo>
+                <a:lnTo>
+                  <a:pt x="1261368" y="108936"/>
+                </a:lnTo>
+                <a:lnTo>
+                  <a:pt x="1276035" y="110203"/>
+                </a:lnTo>
+                <a:lnTo>
+                  <a:pt x="1290702" y="111470"/>
+                </a:lnTo>
+                <a:lnTo>
+                  <a:pt x="1305369" y="112737"/>
+                </a:lnTo>
+                <a:lnTo>
+                  <a:pt x="1320036" y="114003"/>
+                </a:lnTo>
+                <a:lnTo>
+                  <a:pt x="1334703" y="115270"/>
+                </a:lnTo>
+                <a:lnTo>
+                  <a:pt x="1349370" y="116537"/>
+                </a:lnTo>
+                <a:lnTo>
+                  <a:pt x="1364037" y="117803"/>
+                </a:lnTo>
+                <a:lnTo>
+                  <a:pt x="1378704" y="119070"/>
+                </a:lnTo>
+                <a:lnTo>
+                  <a:pt x="1393371" y="120337"/>
+                </a:lnTo>
+                <a:lnTo>
+                  <a:pt x="1408039" y="121603"/>
+                </a:lnTo>
+                <a:lnTo>
+                  <a:pt x="1422706" y="122870"/>
+                </a:lnTo>
+                <a:lnTo>
+                  <a:pt x="1437373" y="124137"/>
+                </a:lnTo>
+                <a:lnTo>
+                  <a:pt x="1452040" y="125404"/>
+                </a:lnTo>
+                <a:lnTo>
+                  <a:pt x="1466707" y="126670"/>
+                </a:lnTo>
+                <a:lnTo>
+                  <a:pt x="1481374" y="127937"/>
+                </a:lnTo>
+                <a:lnTo>
+                  <a:pt x="1496041" y="129204"/>
+                </a:lnTo>
+                <a:lnTo>
+                  <a:pt x="1510708" y="130470"/>
+                </a:lnTo>
+                <a:lnTo>
+                  <a:pt x="1525375" y="131737"/>
+                </a:lnTo>
+                <a:lnTo>
+                  <a:pt x="1540042" y="133004"/>
+                </a:lnTo>
+                <a:lnTo>
+                  <a:pt x="1554709" y="134270"/>
+                </a:lnTo>
+                <a:lnTo>
+                  <a:pt x="1569376" y="135537"/>
+                </a:lnTo>
+                <a:lnTo>
+                  <a:pt x="1584043" y="136804"/>
+                </a:lnTo>
+                <a:lnTo>
+                  <a:pt x="1598710" y="138071"/>
+                </a:lnTo>
+                <a:lnTo>
+                  <a:pt x="1613377" y="139337"/>
+                </a:lnTo>
+                <a:lnTo>
+                  <a:pt x="1628045" y="140604"/>
+                </a:lnTo>
+                <a:lnTo>
+                  <a:pt x="1642712" y="141871"/>
+                </a:lnTo>
+                <a:lnTo>
+                  <a:pt x="1657379" y="143137"/>
+                </a:lnTo>
+                <a:lnTo>
+                  <a:pt x="1672046" y="144404"/>
+                </a:lnTo>
+                <a:lnTo>
+                  <a:pt x="1686713" y="145671"/>
+                </a:lnTo>
+                <a:lnTo>
+                  <a:pt x="1701380" y="146937"/>
+                </a:lnTo>
+                <a:lnTo>
+                  <a:pt x="1716047" y="148204"/>
+                </a:lnTo>
+                <a:lnTo>
+                  <a:pt x="1730714" y="149471"/>
+                </a:lnTo>
+                <a:lnTo>
+                  <a:pt x="1745381" y="150738"/>
+                </a:lnTo>
+                <a:lnTo>
+                  <a:pt x="1760048" y="152004"/>
+                </a:lnTo>
+                <a:lnTo>
+                  <a:pt x="1774715" y="153271"/>
+                </a:lnTo>
+                <a:lnTo>
+                  <a:pt x="1789382" y="154538"/>
+                </a:lnTo>
+                <a:lnTo>
+                  <a:pt x="1804049" y="155804"/>
+                </a:lnTo>
+                <a:lnTo>
+                  <a:pt x="1818716" y="157071"/>
+                </a:lnTo>
+                <a:lnTo>
+                  <a:pt x="1833383" y="158338"/>
+                </a:lnTo>
+                <a:lnTo>
+                  <a:pt x="1848051" y="159604"/>
+                </a:lnTo>
+                <a:lnTo>
+                  <a:pt x="1862718" y="160871"/>
+                </a:lnTo>
+                <a:lnTo>
+                  <a:pt x="1877385" y="162138"/>
+                </a:lnTo>
+                <a:lnTo>
+                  <a:pt x="1892052" y="163405"/>
+                </a:lnTo>
+                <a:lnTo>
+                  <a:pt x="1906719" y="164671"/>
+                </a:lnTo>
+                <a:lnTo>
+                  <a:pt x="1921386" y="165938"/>
+                </a:lnTo>
+                <a:lnTo>
+                  <a:pt x="1936053" y="167205"/>
+                </a:lnTo>
+                <a:lnTo>
+                  <a:pt x="1950720" y="168471"/>
+                </a:lnTo>
+                <a:lnTo>
+                  <a:pt x="1965387" y="169738"/>
+                </a:lnTo>
+                <a:lnTo>
+                  <a:pt x="1980054" y="171005"/>
+                </a:lnTo>
+                <a:lnTo>
+                  <a:pt x="1994721" y="172272"/>
+                </a:lnTo>
+                <a:lnTo>
+                  <a:pt x="2009388" y="173538"/>
+                </a:lnTo>
+                <a:lnTo>
+                  <a:pt x="2024055" y="174805"/>
+                </a:lnTo>
+                <a:lnTo>
+                  <a:pt x="2038722" y="176072"/>
+                </a:lnTo>
+                <a:lnTo>
+                  <a:pt x="2053390" y="177338"/>
+                </a:lnTo>
+                <a:lnTo>
+                  <a:pt x="2068057" y="178605"/>
+                </a:lnTo>
+                <a:lnTo>
+                  <a:pt x="2082724" y="179872"/>
+                </a:lnTo>
+                <a:lnTo>
+                  <a:pt x="2097391" y="181138"/>
+                </a:lnTo>
+                <a:lnTo>
+                  <a:pt x="2112058" y="182405"/>
+                </a:lnTo>
+                <a:lnTo>
+                  <a:pt x="2126725" y="183672"/>
+                </a:lnTo>
+                <a:lnTo>
+                  <a:pt x="2141392" y="184939"/>
+                </a:lnTo>
+                <a:lnTo>
+                  <a:pt x="2156059" y="186205"/>
+                </a:lnTo>
+                <a:lnTo>
+                  <a:pt x="2170726" y="187472"/>
+                </a:lnTo>
+                <a:lnTo>
+                  <a:pt x="2185393" y="188739"/>
+                </a:lnTo>
+                <a:lnTo>
+                  <a:pt x="2200060" y="190005"/>
+                </a:lnTo>
+                <a:lnTo>
+                  <a:pt x="2214727" y="191272"/>
+                </a:lnTo>
+                <a:lnTo>
+                  <a:pt x="2229394" y="192539"/>
+                </a:lnTo>
+                <a:lnTo>
+                  <a:pt x="2244061" y="193805"/>
+                </a:lnTo>
+                <a:lnTo>
+                  <a:pt x="2258728" y="195072"/>
+                </a:lnTo>
+                <a:lnTo>
+                  <a:pt x="2273396" y="196339"/>
+                </a:lnTo>
+                <a:lnTo>
+                  <a:pt x="2288063" y="197606"/>
+                </a:lnTo>
+                <a:lnTo>
+                  <a:pt x="2302730" y="198872"/>
+                </a:lnTo>
+                <a:lnTo>
+                  <a:pt x="2317397" y="200139"/>
+                </a:lnTo>
+                <a:lnTo>
+                  <a:pt x="2332064" y="201406"/>
+                </a:lnTo>
+                <a:lnTo>
+                  <a:pt x="2346731" y="202672"/>
+                </a:lnTo>
+                <a:lnTo>
+                  <a:pt x="2361398" y="203939"/>
+                </a:lnTo>
+                <a:lnTo>
+                  <a:pt x="2376065" y="205206"/>
+                </a:lnTo>
+                <a:lnTo>
+                  <a:pt x="2390732" y="206472"/>
+                </a:lnTo>
+                <a:lnTo>
+                  <a:pt x="2405399" y="207739"/>
+                </a:lnTo>
+                <a:lnTo>
+                  <a:pt x="2420066" y="209006"/>
+                </a:lnTo>
+                <a:lnTo>
+                  <a:pt x="2434733" y="210273"/>
+                </a:lnTo>
+                <a:lnTo>
+                  <a:pt x="2449400" y="211539"/>
+                </a:lnTo>
+                <a:lnTo>
+                  <a:pt x="2464067" y="212806"/>
+                </a:lnTo>
+                <a:lnTo>
+                  <a:pt x="2478734" y="214073"/>
+                </a:lnTo>
+                <a:lnTo>
+                  <a:pt x="2493402" y="215339"/>
+                </a:lnTo>
+                <a:lnTo>
+                  <a:pt x="2508069" y="216606"/>
+                </a:lnTo>
+                <a:lnTo>
+                  <a:pt x="2522736" y="217873"/>
+                </a:lnTo>
+                <a:lnTo>
+                  <a:pt x="2537403" y="219139"/>
+                </a:lnTo>
+                <a:lnTo>
+                  <a:pt x="2552070" y="220406"/>
+                </a:lnTo>
+                <a:lnTo>
+                  <a:pt x="2566737" y="221673"/>
+                </a:lnTo>
+                <a:lnTo>
+                  <a:pt x="2581404" y="222940"/>
+                </a:lnTo>
+                <a:lnTo>
+                  <a:pt x="2596071" y="224206"/>
+                </a:lnTo>
+                <a:lnTo>
+                  <a:pt x="2610738" y="225473"/>
+                </a:lnTo>
+                <a:lnTo>
+                  <a:pt x="2625405" y="226740"/>
+                </a:lnTo>
+                <a:lnTo>
+                  <a:pt x="2640072" y="228006"/>
+                </a:lnTo>
+                <a:lnTo>
+                  <a:pt x="2654739" y="229273"/>
+                </a:lnTo>
+                <a:lnTo>
+                  <a:pt x="2669406" y="230540"/>
+                </a:lnTo>
+                <a:lnTo>
+                  <a:pt x="2684073" y="231806"/>
+                </a:lnTo>
+                <a:lnTo>
+                  <a:pt x="2698740" y="233073"/>
+                </a:lnTo>
+                <a:lnTo>
+                  <a:pt x="2713408" y="234340"/>
+                </a:lnTo>
+                <a:lnTo>
+                  <a:pt x="2728075" y="235607"/>
+                </a:lnTo>
+                <a:lnTo>
+                  <a:pt x="2742742" y="236873"/>
+                </a:lnTo>
+                <a:lnTo>
+                  <a:pt x="2757409" y="238140"/>
+                </a:lnTo>
+                <a:lnTo>
+                  <a:pt x="2772076" y="239407"/>
+                </a:lnTo>
+                <a:lnTo>
+                  <a:pt x="2786743" y="240673"/>
+                </a:lnTo>
+                <a:lnTo>
+                  <a:pt x="2801410" y="241940"/>
+                </a:lnTo>
+                <a:lnTo>
+                  <a:pt x="2816077" y="243207"/>
+                </a:lnTo>
+                <a:lnTo>
+                  <a:pt x="2830744" y="244473"/>
+                </a:lnTo>
+                <a:lnTo>
+                  <a:pt x="2845411" y="245740"/>
+                </a:lnTo>
+                <a:lnTo>
+                  <a:pt x="2860078" y="247007"/>
+                </a:lnTo>
+                <a:lnTo>
+                  <a:pt x="2874745" y="248274"/>
+                </a:lnTo>
+                <a:lnTo>
+                  <a:pt x="2889412" y="249540"/>
+                </a:lnTo>
+                <a:lnTo>
+                  <a:pt x="2904079" y="250807"/>
+                </a:lnTo>
+                <a:lnTo>
+                  <a:pt x="2918747" y="252074"/>
+                </a:lnTo>
+              </a:path>
+            </a:pathLst>
+          </a:custGeom>
+          <a:noFill/>
+          <a:ln w="38100">
+            <a:solidFill>
+              <a:srgbClr val="8EDBD4"/>
+            </a:solidFill>
+          </a:ln>
+          <a:effectLst/>
+        </p:spPr>
+        <p:txBody>
+          <a:bodyPr rtlCol="0" anchor="ctr"/>
+          <a:lstStyle/>
+          <a:p>
+            <a:pPr algn="ctr"/>
           </a:p>
         </p:txBody>
       </p:sp>
       <p:cxnSp>
         <p:nvCxnSpPr>
-          <p:cNvPr id="7" name="arrow6" descr="sci-ppt:C2-E21-006"/>
+          <p:cNvPr id="9" name="C2-E21 line 7" descr="sci-ppt:o007"/>
           <p:cNvCxnSpPr/>
           <p:nvPr/>
         </p:nvCxnSpPr>
         <p:spPr>
-          <a:xfrm flipH="1">
-            <a:off x="3657600" y="2804160"/>
-            <a:ext cx="3779520" cy="0"/>
+          <a:xfrm>
+            <a:off x="3840480" y="1371600"/>
+            <a:ext cx="0" cy="3474720"/>
           </a:xfrm>
           <a:prstGeom prst="line">
             <a:avLst/>
           </a:prstGeom>
-          <a:ln w="25400">
+          <a:ln w="16510">
             <a:solidFill>
-              <a:srgbClr val="F6BC77"/>
+              <a:srgbClr val="B4C7D2"/>
+            </a:solidFill>
+            <a:prstDash val="dash"/>
+          </a:ln>
+          <a:effectLst/>
+        </p:spPr>
+      </p:cxnSp>
+      <p:sp>
+        <p:nvSpPr>
+          <p:cNvPr id="10" name="C2-E21 ellipse 8" descr="sci-ppt:o008"/>
+          <p:cNvSpPr/>
+          <p:nvPr/>
+        </p:nvSpPr>
+        <p:spPr>
+          <a:xfrm>
+            <a:off x="3767328" y="1930215"/>
+            <a:ext cx="146304" cy="146304"/>
+          </a:xfrm>
+          <a:prstGeom prst="ellipse">
+            <a:avLst/>
+          </a:prstGeom>
+          <a:solidFill>
+            <a:srgbClr val="F28BA0"/>
+          </a:solidFill>
+          <a:ln w="12700">
+            <a:solidFill>
+              <a:srgbClr val="F28BA0"/>
+            </a:solidFill>
+          </a:ln>
+          <a:effectLst/>
+        </p:spPr>
+        <p:txBody>
+          <a:bodyPr rtlCol="0" anchor="ctr"/>
+          <a:lstStyle/>
+          <a:p>
+            <a:pPr algn="ctr"/>
+          </a:p>
+        </p:txBody>
+      </p:sp>
+      <p:sp>
+        <p:nvSpPr>
+          <p:cNvPr id="11" name="C2-E21 text 9" descr="sci-ppt:o009"/>
+          <p:cNvSpPr txBox="1"/>
+          <p:nvPr/>
+        </p:nvSpPr>
+        <p:spPr>
+          <a:xfrm>
+            <a:off x="1280160" y="1438101"/>
+            <a:ext cx="2194560" cy="417576"/>
+          </a:xfrm>
+          <a:prstGeom prst="rect">
+            <a:avLst/>
+          </a:prstGeom>
+          <a:noFill/>
+          <a:effectLst/>
+        </p:spPr>
+        <p:txBody>
+          <a:bodyPr wrap="none" lIns="18288" rIns="18288" tIns="18288" bIns="18288" anchor="t">
+            <a:spAutoFit/>
+          </a:bodyPr>
+          <a:lstStyle/>
+          <a:p>
+            <a:pPr algn="l">
+              <a:spcAft>
+                <a:spcPts val="0"/>
+              </a:spcAft>
+            </a:pPr>
+            <a:r>
+              <a:rPr sz="1200" b="0" i="0">
+                <a:solidFill>
+                  <a:srgbClr val="F2B880"/>
+                </a:solidFill>
+                <a:latin typeface="Arial"/>
+              </a:rPr>
+              <a:t>liquid: steep gradient</a:t>
+            </a:r>
+          </a:p>
+          <a:p>
+            <a:pPr algn="l">
+              <a:spcAft>
+                <a:spcPts val="0"/>
+              </a:spcAft>
+            </a:pPr>
+            <a:r>
+              <a:rPr sz="1200" b="0" i="0">
+                <a:solidFill>
+                  <a:srgbClr val="F2B880"/>
+                </a:solidFill>
+                <a:latin typeface="Arial"/>
+              </a:rPr>
+              <a:t>(larger qₗ)</a:t>
+            </a:r>
+          </a:p>
+        </p:txBody>
+      </p:sp>
+      <p:sp>
+        <p:nvSpPr>
+          <p:cNvPr id="12" name="C2-E21 text 10" descr="sci-ppt:o010"/>
+          <p:cNvSpPr txBox="1"/>
+          <p:nvPr/>
+        </p:nvSpPr>
+        <p:spPr>
+          <a:xfrm>
+            <a:off x="4352544" y="1438101"/>
+            <a:ext cx="2194560" cy="417576"/>
+          </a:xfrm>
+          <a:prstGeom prst="rect">
+            <a:avLst/>
+          </a:prstGeom>
+          <a:noFill/>
+          <a:effectLst/>
+        </p:spPr>
+        <p:txBody>
+          <a:bodyPr wrap="none" lIns="18288" rIns="18288" tIns="18288" bIns="18288" anchor="t">
+            <a:spAutoFit/>
+          </a:bodyPr>
+          <a:lstStyle/>
+          <a:p>
+            <a:pPr algn="l">
+              <a:spcAft>
+                <a:spcPts val="0"/>
+              </a:spcAft>
+            </a:pPr>
+            <a:r>
+              <a:rPr sz="1200" b="0" i="0">
+                <a:solidFill>
+                  <a:srgbClr val="8EDBD4"/>
+                </a:solidFill>
+                <a:latin typeface="Arial"/>
+              </a:rPr>
+              <a:t>vapor: gentle gradient</a:t>
+            </a:r>
+          </a:p>
+          <a:p>
+            <a:pPr algn="l">
+              <a:spcAft>
+                <a:spcPts val="0"/>
+              </a:spcAft>
+            </a:pPr>
+            <a:r>
+              <a:rPr sz="1200" b="0" i="0">
+                <a:solidFill>
+                  <a:srgbClr val="8EDBD4"/>
+                </a:solidFill>
+                <a:latin typeface="Arial"/>
+              </a:rPr>
+              <a:t>(smaller qᵥ)</a:t>
+            </a:r>
+          </a:p>
+        </p:txBody>
+      </p:sp>
+      <p:cxnSp>
+        <p:nvCxnSpPr>
+          <p:cNvPr id="13" name="C2-E21 arrow 11" descr="sci-ppt:o011"/>
+          <p:cNvCxnSpPr/>
+          <p:nvPr/>
+        </p:nvCxnSpPr>
+        <p:spPr>
+          <a:xfrm>
+            <a:off x="2377440" y="4056610"/>
+            <a:ext cx="1316736" cy="0"/>
+          </a:xfrm>
+          <a:prstGeom prst="line">
+            <a:avLst/>
+          </a:prstGeom>
+          <a:ln w="44450">
+            <a:solidFill>
+              <a:srgbClr val="F2B880"/>
             </a:solidFill>
             <a:headEnd type="none" w="med" len="med"/>
             <a:tailEnd type="triangle" w="med" len="med"/>
@@ -3302,56 +4727,16 @@
           <a:effectLst/>
         </p:spPr>
       </p:cxnSp>
-      <p:sp>
-        <p:nvSpPr>
-          <p:cNvPr id="8" name="text7" descr="sci-ppt:C2-E21-007"/>
-          <p:cNvSpPr txBox="1"/>
-          <p:nvPr/>
-        </p:nvSpPr>
-        <p:spPr>
-          <a:xfrm>
-            <a:off x="5852160" y="3108960"/>
-            <a:ext cx="4145280" cy="377952"/>
-          </a:xfrm>
-          <a:prstGeom prst="rect">
-            <a:avLst/>
-          </a:prstGeom>
-          <a:noFill/>
-          <a:effectLst/>
-        </p:spPr>
-        <p:txBody>
-          <a:bodyPr wrap="none" lIns="27432" rIns="27432" tIns="18288" bIns="18288" anchor="ctr">
-            <a:spAutoFit/>
-          </a:bodyPr>
-          <a:lstStyle/>
-          <a:p>
-            <a:pPr algn="l">
-              <a:spcAft>
-                <a:spcPts val="0"/>
-              </a:spcAft>
-            </a:pPr>
-            <a:r>
-              <a:rPr sz="1920" b="0" i="0">
-                <a:solidFill>
-                  <a:srgbClr val="F6BC77"/>
-                </a:solidFill>
-                <a:latin typeface="Arial"/>
-              </a:rPr>
-              <a:t>n: liquid → vapor</a:t>
-            </a:r>
-          </a:p>
-        </p:txBody>
-      </p:sp>
       <p:cxnSp>
         <p:nvCxnSpPr>
-          <p:cNvPr id="9" name="arrow8" descr="sci-ppt:C2-E21-008"/>
+          <p:cNvPr id="14" name="C2-E21 arrow 12" descr="sci-ppt:o012"/>
           <p:cNvCxnSpPr/>
           <p:nvPr/>
         </p:nvCxnSpPr>
         <p:spPr>
           <a:xfrm>
-            <a:off x="5242560" y="3779520"/>
-            <a:ext cx="1402080" cy="0"/>
+            <a:off x="3986784" y="4056610"/>
+            <a:ext cx="1316736" cy="0"/>
           </a:xfrm>
           <a:prstGeom prst="line">
             <a:avLst/>
@@ -3368,14 +4753,14 @@
       </p:cxnSp>
       <p:sp>
         <p:nvSpPr>
-          <p:cNvPr id="10" name="text9" descr="sci-ppt:C2-E21-009"/>
+          <p:cNvPr id="15" name="C2-E21 text 13" descr="sci-ppt:o013"/>
           <p:cNvSpPr txBox="1"/>
           <p:nvPr/>
         </p:nvSpPr>
         <p:spPr>
           <a:xfrm>
-            <a:off x="5486400" y="4206240"/>
-            <a:ext cx="4267200" cy="340156"/>
+            <a:off x="2304288" y="3712464"/>
+            <a:ext cx="1097280" cy="239395"/>
           </a:xfrm>
           <a:prstGeom prst="rect">
             <a:avLst/>
@@ -3384,7 +4769,7 @@
           <a:effectLst/>
         </p:spPr>
         <p:txBody>
-          <a:bodyPr wrap="none" lIns="27432" rIns="27432" tIns="18288" bIns="18288" anchor="ctr">
+          <a:bodyPr wrap="none" lIns="18288" rIns="18288" tIns="18288" bIns="18288" anchor="t">
             <a:spAutoFit/>
           </a:bodyPr>
           <a:lstStyle/>
@@ -3395,27 +4780,27 @@
               </a:spcAft>
             </a:pPr>
             <a:r>
-              <a:rPr sz="1728" b="0" i="0">
+              <a:rPr sz="1250" b="0" i="0">
                 <a:solidFill>
-                  <a:srgbClr val="E7F0F3"/>
+                  <a:srgbClr val="F2B880"/>
                 </a:solidFill>
                 <a:latin typeface="Arial"/>
               </a:rPr>
-              <a:t>+e_r, wall motion</a:t>
-            </a:r>
-          </a:p>
-        </p:txBody>
-      </p:sp>
-      <p:sp>
-        <p:nvSpPr>
-          <p:cNvPr id="11" name="text10" descr="sci-ppt:C2-E21-010"/>
+              <a:t>qₗ·n</a:t>
+            </a:r>
+          </a:p>
+        </p:txBody>
+      </p:sp>
+      <p:sp>
+        <p:nvSpPr>
+          <p:cNvPr id="16" name="C2-E21 text 14" descr="sci-ppt:o014"/>
           <p:cNvSpPr txBox="1"/>
           <p:nvPr/>
         </p:nvSpPr>
         <p:spPr>
           <a:xfrm>
-            <a:off x="1219200" y="1036320"/>
-            <a:ext cx="3657600" cy="359054"/>
+            <a:off x="4352544" y="3712464"/>
+            <a:ext cx="1097280" cy="239395"/>
           </a:xfrm>
           <a:prstGeom prst="rect">
             <a:avLst/>
@@ -3424,7 +4809,7 @@
           <a:effectLst/>
         </p:spPr>
         <p:txBody>
-          <a:bodyPr wrap="none" lIns="27432" rIns="27432" tIns="18288" bIns="18288" anchor="ctr">
+          <a:bodyPr wrap="none" lIns="18288" rIns="18288" tIns="18288" bIns="18288" anchor="t">
             <a:spAutoFit/>
           </a:bodyPr>
           <a:lstStyle/>
@@ -3435,27 +4820,59 @@
               </a:spcAft>
             </a:pPr>
             <a:r>
-              <a:rPr sz="1823" b="0" i="0">
+              <a:rPr sz="1250" b="0" i="0">
                 <a:solidFill>
-                  <a:srgbClr val="E7F0F3"/>
+                  <a:srgbClr val="8EDBD4"/>
                 </a:solidFill>
                 <a:latin typeface="Arial"/>
               </a:rPr>
-              <a:t>Interface Gamma</a:t>
-            </a:r>
-          </a:p>
-        </p:txBody>
-      </p:sp>
-      <p:sp>
-        <p:nvSpPr>
-          <p:cNvPr id="12" name="text11" descr="sci-ppt:C2-E21-011"/>
+              <a:t>qᵥ·n</a:t>
+            </a:r>
+          </a:p>
+        </p:txBody>
+      </p:sp>
+      <p:sp>
+        <p:nvSpPr>
+          <p:cNvPr id="17" name="C2-E21 round_rect 15" descr="sci-ppt:o015"/>
+          <p:cNvSpPr/>
+          <p:nvPr/>
+        </p:nvSpPr>
+        <p:spPr>
+          <a:xfrm>
+            <a:off x="7040880" y="1371600"/>
+            <a:ext cx="4800600" cy="3474720"/>
+          </a:xfrm>
+          <a:prstGeom prst="roundRect">
+            <a:avLst/>
+          </a:prstGeom>
+          <a:solidFill>
+            <a:srgbClr val="213E4B"/>
+          </a:solidFill>
+          <a:ln w="20320">
+            <a:solidFill>
+              <a:srgbClr val="8EDBD4"/>
+            </a:solidFill>
+          </a:ln>
+          <a:effectLst/>
+        </p:spPr>
+        <p:txBody>
+          <a:bodyPr rtlCol="0" anchor="ctr"/>
+          <a:lstStyle/>
+          <a:p>
+            <a:pPr algn="ctr"/>
+          </a:p>
+        </p:txBody>
+      </p:sp>
+      <p:sp>
+        <p:nvSpPr>
+          <p:cNvPr id="18" name="C2-E21 text 16" descr="sci-ppt:o016"/>
           <p:cNvSpPr txBox="1"/>
           <p:nvPr/>
         </p:nvSpPr>
         <p:spPr>
           <a:xfrm>
-            <a:off x="365760" y="4974336"/>
-            <a:ext cx="5547360" cy="321259"/>
+            <a:off x="7150608" y="1426464"/>
+            <a:ext cx="4581144" cy="247142"/>
           </a:xfrm>
           <a:prstGeom prst="rect">
             <a:avLst/>
@@ -3464,7 +4881,7 @@
           <a:effectLst/>
         </p:spPr>
         <p:txBody>
-          <a:bodyPr wrap="none" lIns="27432" rIns="27432" tIns="18288" bIns="18288" anchor="ctr">
+          <a:bodyPr wrap="none" lIns="18288" rIns="18288" tIns="18288" bIns="18288" anchor="t">
             <a:spAutoFit/>
           </a:bodyPr>
           <a:lstStyle/>
@@ -3475,27 +4892,27 @@
               </a:spcAft>
             </a:pPr>
             <a:r>
-              <a:rPr sz="1632" b="0" i="0">
+              <a:rPr sz="1300" b="1" i="0">
                 <a:solidFill>
-                  <a:srgbClr val="E7F0F3"/>
+                  <a:srgbClr val="8EDBD4"/>
                 </a:solidFill>
                 <a:latin typeface="Arial"/>
               </a:rPr>
-              <a:t>n: liquid → vapor</a:t>
-            </a:r>
-          </a:p>
-        </p:txBody>
-      </p:sp>
-      <p:sp>
-        <p:nvSpPr>
-          <p:cNvPr id="13" name="text12" descr="sci-ppt:C2-E21-012"/>
+              <a:t>Heat that is not passed on becomes latent heat</a:t>
+            </a:r>
+          </a:p>
+        </p:txBody>
+      </p:sp>
+      <p:sp>
+        <p:nvSpPr>
+          <p:cNvPr id="19" name="C2-E21 text 17" descr="sci-ppt:o017"/>
           <p:cNvSpPr txBox="1"/>
           <p:nvPr/>
         </p:nvSpPr>
         <p:spPr>
           <a:xfrm>
-            <a:off x="365760" y="5266944"/>
-            <a:ext cx="5547360" cy="321259"/>
+            <a:off x="7178040" y="1828800"/>
+            <a:ext cx="4572000" cy="262636"/>
           </a:xfrm>
           <a:prstGeom prst="rect">
             <a:avLst/>
@@ -3504,7 +4921,7 @@
           <a:effectLst/>
         </p:spPr>
         <p:txBody>
-          <a:bodyPr wrap="none" lIns="27432" rIns="27432" tIns="18288" bIns="18288" anchor="ctr">
+          <a:bodyPr wrap="none" lIns="18288" rIns="18288" tIns="18288" bIns="18288" anchor="t">
             <a:spAutoFit/>
           </a:bodyPr>
           <a:lstStyle/>
@@ -3515,27 +4932,27 @@
               </a:spcAft>
             </a:pPr>
             <a:r>
-              <a:rPr sz="1632" b="0" i="0">
+              <a:rPr sz="1400" b="1" i="0">
                 <a:solidFill>
                   <a:srgbClr val="E7F0F3"/>
                 </a:solidFill>
                 <a:latin typeface="Arial"/>
               </a:rPr>
-              <a:t>q_v: heat leaving into vapor</a:t>
-            </a:r>
-          </a:p>
-        </p:txBody>
-      </p:sp>
-      <p:sp>
-        <p:nvSpPr>
-          <p:cNvPr id="14" name="text13" descr="sci-ppt:C2-E21-013"/>
+              <a:t>jₛ Lᵥ,s = (qₗ − qᵥ)·n</a:t>
+            </a:r>
+          </a:p>
+        </p:txBody>
+      </p:sp>
+      <p:sp>
+        <p:nvSpPr>
+          <p:cNvPr id="20" name="C2-E21 text 18" descr="sci-ppt:o018"/>
           <p:cNvSpPr txBox="1"/>
           <p:nvPr/>
         </p:nvSpPr>
         <p:spPr>
           <a:xfrm>
-            <a:off x="365760" y="5559552"/>
-            <a:ext cx="5547360" cy="321259"/>
+            <a:off x="7178040" y="2377440"/>
+            <a:ext cx="4572000" cy="239395"/>
           </a:xfrm>
           <a:prstGeom prst="rect">
             <a:avLst/>
@@ -3544,7 +4961,7 @@
           <a:effectLst/>
         </p:spPr>
         <p:txBody>
-          <a:bodyPr wrap="none" lIns="27432" rIns="27432" tIns="18288" bIns="18288" anchor="ctr">
+          <a:bodyPr wrap="none" lIns="18288" rIns="18288" tIns="18288" bIns="18288" anchor="t">
             <a:spAutoFit/>
           </a:bodyPr>
           <a:lstStyle/>
@@ -3555,27 +4972,27 @@
               </a:spcAft>
             </a:pPr>
             <a:r>
-              <a:rPr sz="1632" b="0" i="0">
+              <a:rPr sz="1250" b="0" i="0">
                 <a:solidFill>
-                  <a:srgbClr val="E7F0F3"/>
+                  <a:srgbClr val="B4C7D2"/>
                 </a:solidFill>
                 <a:latin typeface="Arial"/>
               </a:rPr>
-              <a:t>h_l,s → h_v,s: enthalpy change</a:t>
-            </a:r>
-          </a:p>
-        </p:txBody>
-      </p:sp>
-      <p:sp>
-        <p:nvSpPr>
-          <p:cNvPr id="15" name="text14" descr="sci-ppt:C2-E21-014"/>
+              <a:t>Lᵥ,s = hᵥ,s − hₗ,s &gt; 0 (J/kg)</a:t>
+            </a:r>
+          </a:p>
+        </p:txBody>
+      </p:sp>
+      <p:sp>
+        <p:nvSpPr>
+          <p:cNvPr id="21" name="C2-E21 text 19" descr="sci-ppt:o019"/>
           <p:cNvSpPr txBox="1"/>
           <p:nvPr/>
         </p:nvSpPr>
         <p:spPr>
           <a:xfrm>
-            <a:off x="365760" y="5852160"/>
-            <a:ext cx="5547360" cy="321259"/>
+            <a:off x="7178040" y="2898648"/>
+            <a:ext cx="1737360" cy="223900"/>
           </a:xfrm>
           <a:prstGeom prst="rect">
             <a:avLst/>
@@ -3584,7 +5001,7 @@
           <a:effectLst/>
         </p:spPr>
         <p:txBody>
-          <a:bodyPr wrap="none" lIns="27432" rIns="27432" tIns="18288" bIns="18288" anchor="ctr">
+          <a:bodyPr wrap="none" lIns="18288" rIns="18288" tIns="18288" bIns="18288" anchor="t">
             <a:spAutoFit/>
           </a:bodyPr>
           <a:lstStyle/>
@@ -3595,27 +5012,63 @@
               </a:spcAft>
             </a:pPr>
             <a:r>
-              <a:rPr sz="1632" b="0" i="0">
+              <a:rPr sz="1150" b="0" i="0">
                 <a:solidFill>
                   <a:srgbClr val="E7F0F3"/>
                 </a:solidFill>
                 <a:latin typeface="Arial"/>
               </a:rPr>
-              <a:t>k_l, k_v; T_l, T_v: thermal fields</a:t>
-            </a:r>
-          </a:p>
-        </p:txBody>
-      </p:sp>
-      <p:sp>
-        <p:nvSpPr>
-          <p:cNvPr id="16" name="text15" descr="sci-ppt:C2-E21-015"/>
+              <a:t>qₗ·n arriving</a:t>
+            </a:r>
+          </a:p>
+        </p:txBody>
+      </p:sp>
+      <p:sp>
+        <p:nvSpPr>
+          <p:cNvPr id="22" name="C2-E21 rect 20" descr="sci-ppt:o020"/>
+          <p:cNvSpPr/>
+          <p:nvPr/>
+        </p:nvSpPr>
+        <p:spPr>
+          <a:xfrm>
+            <a:off x="9006840" y="2880360"/>
+            <a:ext cx="1371600" cy="292608"/>
+          </a:xfrm>
+          <a:prstGeom prst="rect">
+            <a:avLst/>
+          </a:prstGeom>
+          <a:solidFill>
+            <a:srgbClr val="F2B880">
+              <a:alpha val="85000"/>
+            </a:srgbClr>
+          </a:solidFill>
+          <a:ln w="12700">
+            <a:solidFill>
+              <a:srgbClr val="F2B880">
+                <a:alpha val="85000"/>
+              </a:srgbClr>
+            </a:solidFill>
+          </a:ln>
+          <a:effectLst/>
+        </p:spPr>
+        <p:txBody>
+          <a:bodyPr rtlCol="0" anchor="ctr"/>
+          <a:lstStyle/>
+          <a:p>
+            <a:pPr algn="ctr"/>
+          </a:p>
+        </p:txBody>
+      </p:sp>
+      <p:sp>
+        <p:nvSpPr>
+          <p:cNvPr id="23" name="C2-E21 text 21" descr="sci-ppt:o021"/>
           <p:cNvSpPr txBox="1"/>
           <p:nvPr/>
         </p:nvSpPr>
         <p:spPr>
           <a:xfrm>
-            <a:off x="6156960" y="4974336"/>
-            <a:ext cx="5547360" cy="321259"/>
+            <a:off x="10451592" y="2926079"/>
+            <a:ext cx="1371600" cy="223900"/>
           </a:xfrm>
           <a:prstGeom prst="rect">
             <a:avLst/>
@@ -3624,7 +5077,7 @@
           <a:effectLst/>
         </p:spPr>
         <p:txBody>
-          <a:bodyPr wrap="none" lIns="27432" rIns="27432" tIns="18288" bIns="18288" anchor="ctr">
+          <a:bodyPr wrap="none" lIns="18288" rIns="18288" tIns="18288" bIns="18288" anchor="t">
             <a:spAutoFit/>
           </a:bodyPr>
           <a:lstStyle/>
@@ -3635,27 +5088,27 @@
               </a:spcAft>
             </a:pPr>
             <a:r>
-              <a:rPr sz="1632" b="0" i="0">
+              <a:rPr sz="1150" b="1" i="0">
                 <a:solidFill>
                   <a:srgbClr val="E7F0F3"/>
                 </a:solidFill>
                 <a:latin typeface="Arial"/>
               </a:rPr>
-              <a:t>q_l: heat arriving from liquid</a:t>
-            </a:r>
-          </a:p>
-        </p:txBody>
-      </p:sp>
-      <p:sp>
-        <p:nvSpPr>
-          <p:cNvPr id="17" name="text16" descr="sci-ppt:C2-E21-016"/>
+              <a:t>1000 W/m²</a:t>
+            </a:r>
+          </a:p>
+        </p:txBody>
+      </p:sp>
+      <p:sp>
+        <p:nvSpPr>
+          <p:cNvPr id="24" name="C2-E21 text 22" descr="sci-ppt:o022"/>
           <p:cNvSpPr txBox="1"/>
           <p:nvPr/>
         </p:nvSpPr>
         <p:spPr>
           <a:xfrm>
-            <a:off x="6156960" y="5266944"/>
-            <a:ext cx="5547360" cy="321259"/>
+            <a:off x="7178040" y="3319272"/>
+            <a:ext cx="1737360" cy="223900"/>
           </a:xfrm>
           <a:prstGeom prst="rect">
             <a:avLst/>
@@ -3664,7 +5117,7 @@
           <a:effectLst/>
         </p:spPr>
         <p:txBody>
-          <a:bodyPr wrap="none" lIns="27432" rIns="27432" tIns="18288" bIns="18288" anchor="ctr">
+          <a:bodyPr wrap="none" lIns="18288" rIns="18288" tIns="18288" bIns="18288" anchor="t">
             <a:spAutoFit/>
           </a:bodyPr>
           <a:lstStyle/>
@@ -3675,27 +5128,63 @@
               </a:spcAft>
             </a:pPr>
             <a:r>
-              <a:rPr sz="1632" b="0" i="0">
+              <a:rPr sz="1150" b="0" i="0">
                 <a:solidFill>
                   <a:srgbClr val="E7F0F3"/>
                 </a:solidFill>
                 <a:latin typeface="Arial"/>
               </a:rPr>
-              <a:t>j_s: phase mass flux</a:t>
-            </a:r>
-          </a:p>
-        </p:txBody>
-      </p:sp>
-      <p:sp>
-        <p:nvSpPr>
-          <p:cNvPr id="18" name="text17" descr="sci-ppt:C2-E21-017"/>
+              <a:t>qᵥ·n leaving</a:t>
+            </a:r>
+          </a:p>
+        </p:txBody>
+      </p:sp>
+      <p:sp>
+        <p:nvSpPr>
+          <p:cNvPr id="25" name="C2-E21 rect 23" descr="sci-ppt:o023"/>
+          <p:cNvSpPr/>
+          <p:nvPr/>
+        </p:nvSpPr>
+        <p:spPr>
+          <a:xfrm>
+            <a:off x="9006840" y="3300984"/>
+            <a:ext cx="274320" cy="292608"/>
+          </a:xfrm>
+          <a:prstGeom prst="rect">
+            <a:avLst/>
+          </a:prstGeom>
+          <a:solidFill>
+            <a:srgbClr val="8EDBD4">
+              <a:alpha val="85000"/>
+            </a:srgbClr>
+          </a:solidFill>
+          <a:ln w="12700">
+            <a:solidFill>
+              <a:srgbClr val="8EDBD4">
+                <a:alpha val="85000"/>
+              </a:srgbClr>
+            </a:solidFill>
+          </a:ln>
+          <a:effectLst/>
+        </p:spPr>
+        <p:txBody>
+          <a:bodyPr rtlCol="0" anchor="ctr"/>
+          <a:lstStyle/>
+          <a:p>
+            <a:pPr algn="ctr"/>
+          </a:p>
+        </p:txBody>
+      </p:sp>
+      <p:sp>
+        <p:nvSpPr>
+          <p:cNvPr id="26" name="C2-E21 text 24" descr="sci-ppt:o024"/>
           <p:cNvSpPr txBox="1"/>
           <p:nvPr/>
         </p:nvSpPr>
         <p:spPr>
           <a:xfrm>
-            <a:off x="6156960" y="5559552"/>
-            <a:ext cx="5547360" cy="321259"/>
+            <a:off x="9354312" y="3346703"/>
+            <a:ext cx="1371600" cy="223900"/>
           </a:xfrm>
           <a:prstGeom prst="rect">
             <a:avLst/>
@@ -3704,7 +5193,7 @@
           <a:effectLst/>
         </p:spPr>
         <p:txBody>
-          <a:bodyPr wrap="none" lIns="27432" rIns="27432" tIns="18288" bIns="18288" anchor="ctr">
+          <a:bodyPr wrap="none" lIns="18288" rIns="18288" tIns="18288" bIns="18288" anchor="t">
             <a:spAutoFit/>
           </a:bodyPr>
           <a:lstStyle/>
@@ -3715,27 +5204,27 @@
               </a:spcAft>
             </a:pPr>
             <a:r>
-              <a:rPr sz="1632" b="0" i="0">
+              <a:rPr sz="1150" b="1" i="0">
                 <a:solidFill>
                   <a:srgbClr val="E7F0F3"/>
                 </a:solidFill>
                 <a:latin typeface="Arial"/>
               </a:rPr>
-              <a:t>L_v,s: latent requirement</a:t>
-            </a:r>
-          </a:p>
-        </p:txBody>
-      </p:sp>
-      <p:sp>
-        <p:nvSpPr>
-          <p:cNvPr id="19" name="text18" descr="sci-ppt:C2-E21-018"/>
+              <a:t>200 W/m²</a:t>
+            </a:r>
+          </a:p>
+        </p:txBody>
+      </p:sp>
+      <p:sp>
+        <p:nvSpPr>
+          <p:cNvPr id="27" name="C2-E21 text 25" descr="sci-ppt:o025"/>
           <p:cNvSpPr txBox="1"/>
           <p:nvPr/>
         </p:nvSpPr>
         <p:spPr>
           <a:xfrm>
-            <a:off x="6156960" y="5852160"/>
-            <a:ext cx="5547360" cy="321259"/>
+            <a:off x="7178040" y="3739896"/>
+            <a:ext cx="1737360" cy="223900"/>
           </a:xfrm>
           <a:prstGeom prst="rect">
             <a:avLst/>
@@ -3744,7 +5233,7 @@
           <a:effectLst/>
         </p:spPr>
         <p:txBody>
-          <a:bodyPr wrap="none" lIns="27432" rIns="27432" tIns="18288" bIns="18288" anchor="ctr">
+          <a:bodyPr wrap="none" lIns="18288" rIns="18288" tIns="18288" bIns="18288" anchor="t">
             <a:spAutoFit/>
           </a:bodyPr>
           <a:lstStyle/>
@@ -3755,27 +5244,63 @@
               </a:spcAft>
             </a:pPr>
             <a:r>
-              <a:rPr sz="1632" b="0" i="0">
+              <a:rPr sz="1150" b="0" i="0">
                 <a:solidFill>
                   <a:srgbClr val="E7F0F3"/>
                 </a:solidFill>
                 <a:latin typeface="Arial"/>
               </a:rPr>
-              <a:t>η = l or v; ∇: local gradient</a:t>
-            </a:r>
-          </a:p>
-        </p:txBody>
-      </p:sp>
-      <p:sp>
-        <p:nvSpPr>
-          <p:cNvPr id="20" name="text19" descr="sci-ppt:C2-E21-019"/>
+              <a:t>j Lᵥ = difference</a:t>
+            </a:r>
+          </a:p>
+        </p:txBody>
+      </p:sp>
+      <p:sp>
+        <p:nvSpPr>
+          <p:cNvPr id="28" name="C2-E21 rect 26" descr="sci-ppt:o026"/>
+          <p:cNvSpPr/>
+          <p:nvPr/>
+        </p:nvSpPr>
+        <p:spPr>
+          <a:xfrm>
+            <a:off x="9006840" y="3721608"/>
+            <a:ext cx="1097280" cy="292608"/>
+          </a:xfrm>
+          <a:prstGeom prst="rect">
+            <a:avLst/>
+          </a:prstGeom>
+          <a:solidFill>
+            <a:srgbClr val="F28BA0">
+              <a:alpha val="85000"/>
+            </a:srgbClr>
+          </a:solidFill>
+          <a:ln w="12700">
+            <a:solidFill>
+              <a:srgbClr val="F28BA0">
+                <a:alpha val="85000"/>
+              </a:srgbClr>
+            </a:solidFill>
+          </a:ln>
+          <a:effectLst/>
+        </p:spPr>
+        <p:txBody>
+          <a:bodyPr rtlCol="0" anchor="ctr"/>
+          <a:lstStyle/>
+          <a:p>
+            <a:pPr algn="ctr"/>
+          </a:p>
+        </p:txBody>
+      </p:sp>
+      <p:sp>
+        <p:nvSpPr>
+          <p:cNvPr id="29" name="C2-E21 text 27" descr="sci-ppt:o027"/>
           <p:cNvSpPr txBox="1"/>
           <p:nvPr/>
         </p:nvSpPr>
         <p:spPr>
           <a:xfrm>
-            <a:off x="365760" y="6339840"/>
-            <a:ext cx="11277600" cy="302361"/>
+            <a:off x="10177272" y="3767328"/>
+            <a:ext cx="1371600" cy="223900"/>
           </a:xfrm>
           <a:prstGeom prst="rect">
             <a:avLst/>
@@ -3784,7 +5309,7 @@
           <a:effectLst/>
         </p:spPr>
         <p:txBody>
-          <a:bodyPr wrap="none" lIns="27432" rIns="27432" tIns="18288" bIns="18288" anchor="ctr">
+          <a:bodyPr wrap="none" lIns="18288" rIns="18288" tIns="18288" bIns="18288" anchor="t">
             <a:spAutoFit/>
           </a:bodyPr>
           <a:lstStyle/>
@@ -3795,27 +5320,27 @@
               </a:spcAft>
             </a:pPr>
             <a:r>
-              <a:rPr sz="1536" b="0" i="0">
+              <a:rPr sz="1150" b="1" i="0">
                 <a:solidFill>
-                  <a:srgbClr val="B4C7D2"/>
+                  <a:srgbClr val="E7F0F3"/>
                 </a:solidFill>
                 <a:latin typeface="Arial"/>
               </a:rPr>
-              <a:t>Evaporation j_s &gt; 0 consumes latent enthalpy</a:t>
-            </a:r>
-          </a:p>
-        </p:txBody>
-      </p:sp>
-      <p:sp>
-        <p:nvSpPr>
-          <p:cNvPr id="21" name="text20" descr="sci-ppt:C2-E21-020"/>
+              <a:t>800 W/m²</a:t>
+            </a:r>
+          </a:p>
+        </p:txBody>
+      </p:sp>
+      <p:sp>
+        <p:nvSpPr>
+          <p:cNvPr id="30" name="C2-E21 text 28" descr="sci-ppt:o028"/>
           <p:cNvSpPr txBox="1"/>
           <p:nvPr/>
         </p:nvSpPr>
         <p:spPr>
           <a:xfrm>
-            <a:off x="365760" y="6632448"/>
-            <a:ext cx="11277600" cy="302361"/>
+            <a:off x="914400" y="5440680"/>
+            <a:ext cx="10972800" cy="239395"/>
           </a:xfrm>
           <a:prstGeom prst="rect">
             <a:avLst/>
@@ -3824,7 +5349,7 @@
           <a:effectLst/>
         </p:spPr>
         <p:txBody>
-          <a:bodyPr wrap="none" lIns="27432" rIns="27432" tIns="18288" bIns="18288" anchor="ctr">
+          <a:bodyPr wrap="none" lIns="18288" rIns="18288" tIns="18288" bIns="18288" anchor="t">
             <a:spAutoFit/>
           </a:bodyPr>
           <a:lstStyle/>
@@ -3835,13 +5360,93 @@
               </a:spcAft>
             </a:pPr>
             <a:r>
-              <a:rPr sz="1536" b="0" i="0">
+              <a:rPr sz="1250" b="0" i="0">
+                <a:solidFill>
+                  <a:srgbClr val="E7F0F3"/>
+                </a:solidFill>
+                <a:latin typeface="Arial"/>
+              </a:rPr>
+              <a:t>Fourier law on each side: q_η = −k_η ∇T_η, η = l, v. Signs are fixed by n pointing liquid → vapor.</a:t>
+            </a:r>
+          </a:p>
+        </p:txBody>
+      </p:sp>
+      <p:sp>
+        <p:nvSpPr>
+          <p:cNvPr id="31" name="C2-E21 text 29" descr="sci-ppt:o029"/>
+          <p:cNvSpPr txBox="1"/>
+          <p:nvPr/>
+        </p:nvSpPr>
+        <p:spPr>
+          <a:xfrm>
+            <a:off x="914400" y="5897880"/>
+            <a:ext cx="10972800" cy="239395"/>
+          </a:xfrm>
+          <a:prstGeom prst="rect">
+            <a:avLst/>
+          </a:prstGeom>
+          <a:noFill/>
+          <a:effectLst/>
+        </p:spPr>
+        <p:txBody>
+          <a:bodyPr wrap="none" lIns="18288" rIns="18288" tIns="18288" bIns="18288" anchor="t">
+            <a:spAutoFit/>
+          </a:bodyPr>
+          <a:lstStyle/>
+          <a:p>
+            <a:pPr algn="l">
+              <a:spcAft>
+                <a:spcPts val="0"/>
+              </a:spcAft>
+            </a:pPr>
+            <a:r>
+              <a:rPr sz="1250" b="0" i="0">
+                <a:solidFill>
+                  <a:srgbClr val="F2B880"/>
+                </a:solidFill>
+                <a:latin typeface="Arial"/>
+              </a:rPr>
+              <a:t>Example: 800 W/m² of unbalanced heat with Lᵥ = 95 kJ/kg evaporates j = 8.4 g m⁻² s⁻¹. Fluxes shown are illustrative.</a:t>
+            </a:r>
+          </a:p>
+        </p:txBody>
+      </p:sp>
+      <p:sp>
+        <p:nvSpPr>
+          <p:cNvPr id="32" name="C2-E21 text 30" descr="sci-ppt:o030"/>
+          <p:cNvSpPr txBox="1"/>
+          <p:nvPr/>
+        </p:nvSpPr>
+        <p:spPr>
+          <a:xfrm>
+            <a:off x="320040" y="6510528"/>
+            <a:ext cx="11521440" cy="200660"/>
+          </a:xfrm>
+          <a:prstGeom prst="rect">
+            <a:avLst/>
+          </a:prstGeom>
+          <a:noFill/>
+          <a:effectLst/>
+        </p:spPr>
+        <p:txBody>
+          <a:bodyPr wrap="none" lIns="18288" rIns="18288" tIns="18288" bIns="18288" anchor="t">
+            <a:spAutoFit/>
+          </a:bodyPr>
+          <a:lstStyle/>
+          <a:p>
+            <a:pPr algn="l">
+              <a:spcAft>
+                <a:spcPts val="0"/>
+              </a:spcAft>
+            </a:pPr>
+            <a:r>
+              <a:rPr sz="1000" b="0" i="0">
                 <a:solidFill>
                   <a:srgbClr val="B4C7D2"/>
                 </a:solidFill>
                 <a:latin typeface="Arial"/>
               </a:rPr>
-              <a:t>Condensation j_s &lt; 0 supplies heat to surrounding material</a:t>
+              <a:t>Reduced energy jump of Eq. C2-E21.</a:t>
             </a:r>
           </a:p>
         </p:txBody>
